--- a/Pictures/Chip_comparison.pptx
+++ b/Pictures/Chip_comparison.pptx
@@ -7,7 +7,8 @@
   <p:sldIdLst>
     <p:sldId id="265" r:id="rId2"/>
     <p:sldId id="266" r:id="rId3"/>
-    <p:sldId id="267" r:id="rId4"/>
+    <p:sldId id="268" r:id="rId4"/>
+    <p:sldId id="267" r:id="rId5"/>
   </p:sldIdLst>
   <p:sldSz cx="12192000" cy="6858000"/>
   <p:notesSz cx="6858000" cy="9144000"/>
@@ -108,7 +109,7 @@
   </p:defaultTextStyle>
   <p:extLst>
     <p:ext uri="{EFAFB233-063F-42B5-8137-9DF3F51BA10A}">
-      <p15:sldGuideLst xmlns="" xmlns:p15="http://schemas.microsoft.com/office/powerpoint/2012/main">
+      <p15:sldGuideLst xmlns:p15="http://schemas.microsoft.com/office/powerpoint/2012/main" xmlns="">
         <p15:guide id="1" orient="horz" pos="2160">
           <p15:clr>
             <a:srgbClr val="A4A3A4"/>
@@ -130,7 +131,7 @@
   <p:cmAuthor id="1" name="boichot" initials="b" lastIdx="1" clrIdx="0">
     <p:extLst>
       <p:ext uri="{19B8F6BF-5375-455C-9EA6-DF929625EA0E}">
-        <p15:presenceInfo xmlns="" xmlns:p15="http://schemas.microsoft.com/office/powerpoint/2012/main" userId="boichot" providerId="None"/>
+        <p15:presenceInfo xmlns:p15="http://schemas.microsoft.com/office/powerpoint/2012/main" xmlns="" userId="boichot" providerId="None"/>
       </p:ext>
     </p:extLst>
   </p:cmAuthor>
@@ -269,7 +270,7 @@
             <a:fld id="{4EA84CA3-116E-4ABF-8AA6-EBE32C84C16F}" type="datetimeFigureOut">
               <a:rPr lang="fr-FR" smtClean="0"/>
               <a:pPr/>
-              <a:t>13/09/2026</a:t>
+              <a:t>16/09/2026</a:t>
             </a:fld>
             <a:endParaRPr lang="fr-FR"/>
           </a:p>
@@ -321,7 +322,7 @@
     </p:spTree>
     <p:extLst>
       <p:ext uri="{BB962C8B-B14F-4D97-AF65-F5344CB8AC3E}">
-        <p14:creationId xmlns="" xmlns:p14="http://schemas.microsoft.com/office/powerpoint/2010/main" val="2003778223"/>
+        <p14:creationId xmlns:p14="http://schemas.microsoft.com/office/powerpoint/2010/main" xmlns="" val="2003778223"/>
       </p:ext>
     </p:extLst>
   </p:cSld>
@@ -441,7 +442,7 @@
             <a:fld id="{4EA84CA3-116E-4ABF-8AA6-EBE32C84C16F}" type="datetimeFigureOut">
               <a:rPr lang="fr-FR" smtClean="0"/>
               <a:pPr/>
-              <a:t>13/09/2026</a:t>
+              <a:t>16/09/2026</a:t>
             </a:fld>
             <a:endParaRPr lang="fr-FR"/>
           </a:p>
@@ -493,7 +494,7 @@
     </p:spTree>
     <p:extLst>
       <p:ext uri="{BB962C8B-B14F-4D97-AF65-F5344CB8AC3E}">
-        <p14:creationId xmlns="" xmlns:p14="http://schemas.microsoft.com/office/powerpoint/2010/main" val="3709322164"/>
+        <p14:creationId xmlns:p14="http://schemas.microsoft.com/office/powerpoint/2010/main" xmlns="" val="3709322164"/>
       </p:ext>
     </p:extLst>
   </p:cSld>
@@ -623,7 +624,7 @@
             <a:fld id="{4EA84CA3-116E-4ABF-8AA6-EBE32C84C16F}" type="datetimeFigureOut">
               <a:rPr lang="fr-FR" smtClean="0"/>
               <a:pPr/>
-              <a:t>13/09/2026</a:t>
+              <a:t>16/09/2026</a:t>
             </a:fld>
             <a:endParaRPr lang="fr-FR"/>
           </a:p>
@@ -675,7 +676,7 @@
     </p:spTree>
     <p:extLst>
       <p:ext uri="{BB962C8B-B14F-4D97-AF65-F5344CB8AC3E}">
-        <p14:creationId xmlns="" xmlns:p14="http://schemas.microsoft.com/office/powerpoint/2010/main" val="1419434073"/>
+        <p14:creationId xmlns:p14="http://schemas.microsoft.com/office/powerpoint/2010/main" xmlns="" val="1419434073"/>
       </p:ext>
     </p:extLst>
   </p:cSld>
@@ -795,7 +796,7 @@
             <a:fld id="{4EA84CA3-116E-4ABF-8AA6-EBE32C84C16F}" type="datetimeFigureOut">
               <a:rPr lang="fr-FR" smtClean="0"/>
               <a:pPr/>
-              <a:t>13/09/2026</a:t>
+              <a:t>16/09/2026</a:t>
             </a:fld>
             <a:endParaRPr lang="fr-FR"/>
           </a:p>
@@ -847,7 +848,7 @@
     </p:spTree>
     <p:extLst>
       <p:ext uri="{BB962C8B-B14F-4D97-AF65-F5344CB8AC3E}">
-        <p14:creationId xmlns="" xmlns:p14="http://schemas.microsoft.com/office/powerpoint/2010/main" val="1102157496"/>
+        <p14:creationId xmlns:p14="http://schemas.microsoft.com/office/powerpoint/2010/main" xmlns="" val="1102157496"/>
       </p:ext>
     </p:extLst>
   </p:cSld>
@@ -1043,7 +1044,7 @@
             <a:fld id="{4EA84CA3-116E-4ABF-8AA6-EBE32C84C16F}" type="datetimeFigureOut">
               <a:rPr lang="fr-FR" smtClean="0"/>
               <a:pPr/>
-              <a:t>13/09/2026</a:t>
+              <a:t>16/09/2026</a:t>
             </a:fld>
             <a:endParaRPr lang="fr-FR"/>
           </a:p>
@@ -1095,7 +1096,7 @@
     </p:spTree>
     <p:extLst>
       <p:ext uri="{BB962C8B-B14F-4D97-AF65-F5344CB8AC3E}">
-        <p14:creationId xmlns="" xmlns:p14="http://schemas.microsoft.com/office/powerpoint/2010/main" val="660080195"/>
+        <p14:creationId xmlns:p14="http://schemas.microsoft.com/office/powerpoint/2010/main" xmlns="" val="660080195"/>
       </p:ext>
     </p:extLst>
   </p:cSld>
@@ -1277,7 +1278,7 @@
             <a:fld id="{4EA84CA3-116E-4ABF-8AA6-EBE32C84C16F}" type="datetimeFigureOut">
               <a:rPr lang="fr-FR" smtClean="0"/>
               <a:pPr/>
-              <a:t>13/09/2026</a:t>
+              <a:t>16/09/2026</a:t>
             </a:fld>
             <a:endParaRPr lang="fr-FR"/>
           </a:p>
@@ -1329,7 +1330,7 @@
     </p:spTree>
     <p:extLst>
       <p:ext uri="{BB962C8B-B14F-4D97-AF65-F5344CB8AC3E}">
-        <p14:creationId xmlns="" xmlns:p14="http://schemas.microsoft.com/office/powerpoint/2010/main" val="2283449542"/>
+        <p14:creationId xmlns:p14="http://schemas.microsoft.com/office/powerpoint/2010/main" xmlns="" val="2283449542"/>
       </p:ext>
     </p:extLst>
   </p:cSld>
@@ -1646,7 +1647,7 @@
             <a:fld id="{4EA84CA3-116E-4ABF-8AA6-EBE32C84C16F}" type="datetimeFigureOut">
               <a:rPr lang="fr-FR" smtClean="0"/>
               <a:pPr/>
-              <a:t>13/09/2026</a:t>
+              <a:t>16/09/2026</a:t>
             </a:fld>
             <a:endParaRPr lang="fr-FR"/>
           </a:p>
@@ -1698,7 +1699,7 @@
     </p:spTree>
     <p:extLst>
       <p:ext uri="{BB962C8B-B14F-4D97-AF65-F5344CB8AC3E}">
-        <p14:creationId xmlns="" xmlns:p14="http://schemas.microsoft.com/office/powerpoint/2010/main" val="2663865323"/>
+        <p14:creationId xmlns:p14="http://schemas.microsoft.com/office/powerpoint/2010/main" xmlns="" val="2663865323"/>
       </p:ext>
     </p:extLst>
   </p:cSld>
@@ -1766,7 +1767,7 @@
             <a:fld id="{4EA84CA3-116E-4ABF-8AA6-EBE32C84C16F}" type="datetimeFigureOut">
               <a:rPr lang="fr-FR" smtClean="0"/>
               <a:pPr/>
-              <a:t>13/09/2026</a:t>
+              <a:t>16/09/2026</a:t>
             </a:fld>
             <a:endParaRPr lang="fr-FR"/>
           </a:p>
@@ -1818,7 +1819,7 @@
     </p:spTree>
     <p:extLst>
       <p:ext uri="{BB962C8B-B14F-4D97-AF65-F5344CB8AC3E}">
-        <p14:creationId xmlns="" xmlns:p14="http://schemas.microsoft.com/office/powerpoint/2010/main" val="376323583"/>
+        <p14:creationId xmlns:p14="http://schemas.microsoft.com/office/powerpoint/2010/main" xmlns="" val="376323583"/>
       </p:ext>
     </p:extLst>
   </p:cSld>
@@ -1863,7 +1864,7 @@
             <a:fld id="{4EA84CA3-116E-4ABF-8AA6-EBE32C84C16F}" type="datetimeFigureOut">
               <a:rPr lang="fr-FR" smtClean="0"/>
               <a:pPr/>
-              <a:t>13/09/2026</a:t>
+              <a:t>16/09/2026</a:t>
             </a:fld>
             <a:endParaRPr lang="fr-FR"/>
           </a:p>
@@ -1915,7 +1916,7 @@
     </p:spTree>
     <p:extLst>
       <p:ext uri="{BB962C8B-B14F-4D97-AF65-F5344CB8AC3E}">
-        <p14:creationId xmlns="" xmlns:p14="http://schemas.microsoft.com/office/powerpoint/2010/main" val="3989902220"/>
+        <p14:creationId xmlns:p14="http://schemas.microsoft.com/office/powerpoint/2010/main" xmlns="" val="3989902220"/>
       </p:ext>
     </p:extLst>
   </p:cSld>
@@ -2142,7 +2143,7 @@
             <a:fld id="{4EA84CA3-116E-4ABF-8AA6-EBE32C84C16F}" type="datetimeFigureOut">
               <a:rPr lang="fr-FR" smtClean="0"/>
               <a:pPr/>
-              <a:t>13/09/2026</a:t>
+              <a:t>16/09/2026</a:t>
             </a:fld>
             <a:endParaRPr lang="fr-FR"/>
           </a:p>
@@ -2194,7 +2195,7 @@
     </p:spTree>
     <p:extLst>
       <p:ext uri="{BB962C8B-B14F-4D97-AF65-F5344CB8AC3E}">
-        <p14:creationId xmlns="" xmlns:p14="http://schemas.microsoft.com/office/powerpoint/2010/main" val="1997102884"/>
+        <p14:creationId xmlns:p14="http://schemas.microsoft.com/office/powerpoint/2010/main" xmlns="" val="1997102884"/>
       </p:ext>
     </p:extLst>
   </p:cSld>
@@ -2397,7 +2398,7 @@
             <a:fld id="{4EA84CA3-116E-4ABF-8AA6-EBE32C84C16F}" type="datetimeFigureOut">
               <a:rPr lang="fr-FR" smtClean="0"/>
               <a:pPr/>
-              <a:t>13/09/2026</a:t>
+              <a:t>16/09/2026</a:t>
             </a:fld>
             <a:endParaRPr lang="fr-FR"/>
           </a:p>
@@ -2449,7 +2450,7 @@
     </p:spTree>
     <p:extLst>
       <p:ext uri="{BB962C8B-B14F-4D97-AF65-F5344CB8AC3E}">
-        <p14:creationId xmlns="" xmlns:p14="http://schemas.microsoft.com/office/powerpoint/2010/main" val="3738991770"/>
+        <p14:creationId xmlns:p14="http://schemas.microsoft.com/office/powerpoint/2010/main" xmlns="" val="3738991770"/>
       </p:ext>
     </p:extLst>
   </p:cSld>
@@ -2612,7 +2613,7 @@
             <a:fld id="{4EA84CA3-116E-4ABF-8AA6-EBE32C84C16F}" type="datetimeFigureOut">
               <a:rPr lang="fr-FR" smtClean="0"/>
               <a:pPr/>
-              <a:t>13/09/2026</a:t>
+              <a:t>16/09/2026</a:t>
             </a:fld>
             <a:endParaRPr lang="fr-FR"/>
           </a:p>
@@ -2700,7 +2701,7 @@
     </p:spTree>
     <p:extLst>
       <p:ext uri="{BB962C8B-B14F-4D97-AF65-F5344CB8AC3E}">
-        <p14:creationId xmlns="" xmlns:p14="http://schemas.microsoft.com/office/powerpoint/2010/main" val="4265157320"/>
+        <p14:creationId xmlns:p14="http://schemas.microsoft.com/office/powerpoint/2010/main" xmlns="" val="4265157320"/>
       </p:ext>
     </p:extLst>
   </p:cSld>
@@ -6412,7 +6413,7 @@
     </p:spTree>
     <p:extLst>
       <p:ext uri="{BB962C8B-B14F-4D97-AF65-F5344CB8AC3E}">
-        <p14:creationId xmlns="" xmlns:p14="http://schemas.microsoft.com/office/powerpoint/2010/main" val="3182372557"/>
+        <p14:creationId xmlns:p14="http://schemas.microsoft.com/office/powerpoint/2010/main" xmlns="" val="3182372557"/>
       </p:ext>
     </p:extLst>
   </p:cSld>
@@ -6430,6 +6431,455 @@
 </file>
 
 <file path=ppt/slides/slide3.xml><?xml version="1.0" encoding="utf-8"?>
+<p:sld xmlns:a="http://schemas.openxmlformats.org/drawingml/2006/main" xmlns:r="http://schemas.openxmlformats.org/officeDocument/2006/relationships" xmlns:p="http://schemas.openxmlformats.org/presentationml/2006/main">
+  <p:cSld>
+    <p:spTree>
+      <p:nvGrpSpPr>
+        <p:cNvPr id="1" name=""/>
+        <p:cNvGrpSpPr/>
+        <p:nvPr/>
+      </p:nvGrpSpPr>
+      <p:grpSpPr>
+        <a:xfrm>
+          <a:off x="0" y="0"/>
+          <a:ext cx="0" cy="0"/>
+          <a:chOff x="0" y="0"/>
+          <a:chExt cx="0" cy="0"/>
+        </a:xfrm>
+      </p:grpSpPr>
+      <p:pic>
+        <p:nvPicPr>
+          <p:cNvPr id="1026" name="Picture 2" descr="C:\Users\BOICHOT\Downloads\Arduino_Mega_Burner-main\Pictures\Arduino_Mega_2560_Rev3_pinout.png"/>
+          <p:cNvPicPr>
+            <a:picLocks noChangeAspect="1" noChangeArrowheads="1"/>
+          </p:cNvPicPr>
+          <p:nvPr/>
+        </p:nvPicPr>
+        <p:blipFill>
+          <a:blip r:embed="rId2" cstate="print"/>
+          <a:srcRect/>
+          <a:stretch>
+            <a:fillRect/>
+          </a:stretch>
+        </p:blipFill>
+        <p:spPr bwMode="auto">
+          <a:xfrm>
+            <a:off x="735981" y="847492"/>
+            <a:ext cx="9991492" cy="4883692"/>
+          </a:xfrm>
+          <a:prstGeom prst="rect">
+            <a:avLst/>
+          </a:prstGeom>
+          <a:noFill/>
+        </p:spPr>
+      </p:pic>
+      <p:sp>
+        <p:nvSpPr>
+          <p:cNvPr id="5" name="ZoneTexte 4"/>
+          <p:cNvSpPr txBox="1"/>
+          <p:nvPr/>
+        </p:nvSpPr>
+        <p:spPr>
+          <a:xfrm rot="16200000">
+            <a:off x="3479180" y="2464421"/>
+            <a:ext cx="1690206" cy="369332"/>
+          </a:xfrm>
+          <a:prstGeom prst="rect">
+            <a:avLst/>
+          </a:prstGeom>
+          <a:noFill/>
+        </p:spPr>
+        <p:txBody>
+          <a:bodyPr wrap="none" rtlCol="0">
+            <a:spAutoFit/>
+          </a:bodyPr>
+          <a:lstStyle/>
+          <a:p>
+            <a:r>
+              <a:rPr lang="fr-FR" b="1" dirty="0" err="1" smtClean="0">
+                <a:solidFill>
+                  <a:srgbClr val="FF0000"/>
+                </a:solidFill>
+              </a:rPr>
+              <a:t>Red</a:t>
+            </a:r>
+            <a:r>
+              <a:rPr lang="fr-FR" b="1" dirty="0" smtClean="0">
+                <a:solidFill>
+                  <a:srgbClr val="FF0000"/>
+                </a:solidFill>
+              </a:rPr>
+              <a:t> LED (</a:t>
+            </a:r>
+            <a:r>
+              <a:rPr lang="fr-FR" b="1" dirty="0" err="1" smtClean="0">
+                <a:solidFill>
+                  <a:srgbClr val="FF0000"/>
+                </a:solidFill>
+              </a:rPr>
+              <a:t>Write</a:t>
+            </a:r>
+            <a:r>
+              <a:rPr lang="fr-FR" b="1" dirty="0" smtClean="0">
+                <a:solidFill>
+                  <a:srgbClr val="FF0000"/>
+                </a:solidFill>
+              </a:rPr>
+              <a:t>)</a:t>
+            </a:r>
+            <a:endParaRPr lang="fr-FR" b="1" dirty="0">
+              <a:solidFill>
+                <a:srgbClr val="FF0000"/>
+              </a:solidFill>
+            </a:endParaRPr>
+          </a:p>
+        </p:txBody>
+      </p:sp>
+      <p:sp>
+        <p:nvSpPr>
+          <p:cNvPr id="6" name="ZoneTexte 5"/>
+          <p:cNvSpPr txBox="1"/>
+          <p:nvPr/>
+        </p:nvSpPr>
+        <p:spPr>
+          <a:xfrm rot="16200000">
+            <a:off x="3127626" y="2549914"/>
+            <a:ext cx="1850635" cy="369332"/>
+          </a:xfrm>
+          <a:prstGeom prst="rect">
+            <a:avLst/>
+          </a:prstGeom>
+          <a:noFill/>
+        </p:spPr>
+        <p:txBody>
+          <a:bodyPr wrap="none" rtlCol="0">
+            <a:spAutoFit/>
+          </a:bodyPr>
+          <a:lstStyle/>
+          <a:p>
+            <a:r>
+              <a:rPr lang="fr-FR" b="1" dirty="0" smtClean="0">
+                <a:solidFill>
+                  <a:srgbClr val="00B050"/>
+                </a:solidFill>
+              </a:rPr>
+              <a:t>Green LED (Read)</a:t>
+            </a:r>
+            <a:endParaRPr lang="fr-FR" b="1" dirty="0">
+              <a:solidFill>
+                <a:srgbClr val="00B050"/>
+              </a:solidFill>
+            </a:endParaRPr>
+          </a:p>
+        </p:txBody>
+      </p:sp>
+      <p:sp>
+        <p:nvSpPr>
+          <p:cNvPr id="8" name="Accolade fermante 7"/>
+          <p:cNvSpPr/>
+          <p:nvPr/>
+        </p:nvSpPr>
+        <p:spPr>
+          <a:xfrm>
+            <a:off x="10765574" y="1214552"/>
+            <a:ext cx="334536" cy="3736589"/>
+          </a:xfrm>
+          <a:prstGeom prst="rightBrace">
+            <a:avLst/>
+          </a:prstGeom>
+          <a:ln w="25400"/>
+        </p:spPr>
+        <p:style>
+          <a:lnRef idx="1">
+            <a:schemeClr val="accent1"/>
+          </a:lnRef>
+          <a:fillRef idx="0">
+            <a:schemeClr val="accent1"/>
+          </a:fillRef>
+          <a:effectRef idx="0">
+            <a:schemeClr val="accent1"/>
+          </a:effectRef>
+          <a:fontRef idx="minor">
+            <a:schemeClr val="tx1"/>
+          </a:fontRef>
+        </p:style>
+        <p:txBody>
+          <a:bodyPr rtlCol="0" anchor="ctr"/>
+          <a:lstStyle/>
+          <a:p>
+            <a:pPr algn="ctr"/>
+            <a:endParaRPr lang="fr-FR"/>
+          </a:p>
+        </p:txBody>
+      </p:sp>
+      <p:sp>
+        <p:nvSpPr>
+          <p:cNvPr id="9" name="Accolade ouvrante 8"/>
+          <p:cNvSpPr/>
+          <p:nvPr/>
+        </p:nvSpPr>
+        <p:spPr>
+          <a:xfrm rot="16200000">
+            <a:off x="7501985" y="3872261"/>
+            <a:ext cx="323385" cy="4098074"/>
+          </a:xfrm>
+          <a:prstGeom prst="leftBrace">
+            <a:avLst/>
+          </a:prstGeom>
+          <a:ln w="38100"/>
+        </p:spPr>
+        <p:style>
+          <a:lnRef idx="1">
+            <a:schemeClr val="accent1"/>
+          </a:lnRef>
+          <a:fillRef idx="0">
+            <a:schemeClr val="accent1"/>
+          </a:fillRef>
+          <a:effectRef idx="0">
+            <a:schemeClr val="accent1"/>
+          </a:effectRef>
+          <a:fontRef idx="minor">
+            <a:schemeClr val="tx1"/>
+          </a:fontRef>
+        </p:style>
+        <p:txBody>
+          <a:bodyPr rtlCol="0" anchor="ctr"/>
+          <a:lstStyle/>
+          <a:p>
+            <a:pPr algn="ctr"/>
+            <a:endParaRPr lang="fr-FR"/>
+          </a:p>
+        </p:txBody>
+      </p:sp>
+      <p:sp>
+        <p:nvSpPr>
+          <p:cNvPr id="10" name="Accolade fermante 9"/>
+          <p:cNvSpPr/>
+          <p:nvPr/>
+        </p:nvSpPr>
+        <p:spPr>
+          <a:xfrm rot="16200000">
+            <a:off x="6540982" y="-2051316"/>
+            <a:ext cx="334536" cy="5406765"/>
+          </a:xfrm>
+          <a:prstGeom prst="rightBrace">
+            <a:avLst/>
+          </a:prstGeom>
+          <a:ln w="25400"/>
+        </p:spPr>
+        <p:style>
+          <a:lnRef idx="1">
+            <a:schemeClr val="accent1"/>
+          </a:lnRef>
+          <a:fillRef idx="0">
+            <a:schemeClr val="accent1"/>
+          </a:fillRef>
+          <a:effectRef idx="0">
+            <a:schemeClr val="accent1"/>
+          </a:effectRef>
+          <a:fontRef idx="minor">
+            <a:schemeClr val="tx1"/>
+          </a:fontRef>
+        </p:style>
+        <p:txBody>
+          <a:bodyPr rtlCol="0" anchor="ctr"/>
+          <a:lstStyle/>
+          <a:p>
+            <a:pPr algn="ctr"/>
+            <a:endParaRPr lang="fr-FR"/>
+          </a:p>
+        </p:txBody>
+      </p:sp>
+      <p:sp>
+        <p:nvSpPr>
+          <p:cNvPr id="11" name="ZoneTexte 10"/>
+          <p:cNvSpPr txBox="1"/>
+          <p:nvPr/>
+        </p:nvSpPr>
+        <p:spPr>
+          <a:xfrm>
+            <a:off x="6690730" y="6083655"/>
+            <a:ext cx="2241394" cy="461665"/>
+          </a:xfrm>
+          <a:prstGeom prst="rect">
+            <a:avLst/>
+          </a:prstGeom>
+          <a:noFill/>
+        </p:spPr>
+        <p:txBody>
+          <a:bodyPr wrap="square" rtlCol="0">
+            <a:spAutoFit/>
+          </a:bodyPr>
+          <a:lstStyle/>
+          <a:p>
+            <a:r>
+              <a:rPr lang="fr-FR" sz="2400" b="1" dirty="0" err="1" smtClean="0">
+                <a:solidFill>
+                  <a:schemeClr val="accent1">
+                    <a:lumMod val="75000"/>
+                  </a:schemeClr>
+                </a:solidFill>
+              </a:rPr>
+              <a:t>Analog</a:t>
+            </a:r>
+            <a:r>
+              <a:rPr lang="fr-FR" sz="2400" b="1" dirty="0" smtClean="0">
+                <a:solidFill>
+                  <a:schemeClr val="accent1">
+                    <a:lumMod val="75000"/>
+                  </a:schemeClr>
+                </a:solidFill>
+              </a:rPr>
+              <a:t> (A) pins</a:t>
+            </a:r>
+            <a:endParaRPr lang="fr-FR" sz="2400" b="1" dirty="0">
+              <a:solidFill>
+                <a:schemeClr val="accent1">
+                  <a:lumMod val="75000"/>
+                </a:schemeClr>
+              </a:solidFill>
+            </a:endParaRPr>
+          </a:p>
+        </p:txBody>
+      </p:sp>
+      <p:sp>
+        <p:nvSpPr>
+          <p:cNvPr id="12" name="ZoneTexte 11"/>
+          <p:cNvSpPr txBox="1"/>
+          <p:nvPr/>
+        </p:nvSpPr>
+        <p:spPr>
+          <a:xfrm>
+            <a:off x="5761462" y="0"/>
+            <a:ext cx="2155902" cy="461665"/>
+          </a:xfrm>
+          <a:prstGeom prst="rect">
+            <a:avLst/>
+          </a:prstGeom>
+          <a:noFill/>
+        </p:spPr>
+        <p:txBody>
+          <a:bodyPr wrap="square" rtlCol="0">
+            <a:spAutoFit/>
+          </a:bodyPr>
+          <a:lstStyle/>
+          <a:p>
+            <a:r>
+              <a:rPr lang="fr-FR" sz="2400" b="1" dirty="0" smtClean="0">
+                <a:solidFill>
+                  <a:schemeClr val="accent1">
+                    <a:lumMod val="75000"/>
+                  </a:schemeClr>
+                </a:solidFill>
+              </a:rPr>
+              <a:t>Digital (D) pins</a:t>
+            </a:r>
+            <a:endParaRPr lang="fr-FR" sz="2400" b="1" dirty="0">
+              <a:solidFill>
+                <a:schemeClr val="accent1">
+                  <a:lumMod val="75000"/>
+                </a:schemeClr>
+              </a:solidFill>
+            </a:endParaRPr>
+          </a:p>
+        </p:txBody>
+      </p:sp>
+      <p:sp>
+        <p:nvSpPr>
+          <p:cNvPr id="13" name="ZoneTexte 12"/>
+          <p:cNvSpPr txBox="1"/>
+          <p:nvPr/>
+        </p:nvSpPr>
+        <p:spPr>
+          <a:xfrm rot="5400000">
+            <a:off x="10296298" y="2995958"/>
+            <a:ext cx="2155902" cy="461665"/>
+          </a:xfrm>
+          <a:prstGeom prst="rect">
+            <a:avLst/>
+          </a:prstGeom>
+          <a:noFill/>
+        </p:spPr>
+        <p:txBody>
+          <a:bodyPr wrap="square" rtlCol="0">
+            <a:spAutoFit/>
+          </a:bodyPr>
+          <a:lstStyle/>
+          <a:p>
+            <a:r>
+              <a:rPr lang="fr-FR" sz="2400" b="1" dirty="0" smtClean="0">
+                <a:solidFill>
+                  <a:schemeClr val="accent1">
+                    <a:lumMod val="75000"/>
+                  </a:schemeClr>
+                </a:solidFill>
+              </a:rPr>
+              <a:t>Digital (D) pins</a:t>
+            </a:r>
+            <a:endParaRPr lang="fr-FR" sz="2400" b="1" dirty="0">
+              <a:solidFill>
+                <a:schemeClr val="accent1">
+                  <a:lumMod val="75000"/>
+                </a:schemeClr>
+              </a:solidFill>
+            </a:endParaRPr>
+          </a:p>
+        </p:txBody>
+      </p:sp>
+      <p:sp>
+        <p:nvSpPr>
+          <p:cNvPr id="14" name="ZoneTexte 13"/>
+          <p:cNvSpPr txBox="1"/>
+          <p:nvPr/>
+        </p:nvSpPr>
+        <p:spPr>
+          <a:xfrm rot="16200000">
+            <a:off x="4296616" y="4690949"/>
+            <a:ext cx="560859" cy="369332"/>
+          </a:xfrm>
+          <a:prstGeom prst="rect">
+            <a:avLst/>
+          </a:prstGeom>
+          <a:noFill/>
+        </p:spPr>
+        <p:txBody>
+          <a:bodyPr wrap="none" rtlCol="0">
+            <a:spAutoFit/>
+          </a:bodyPr>
+          <a:lstStyle/>
+          <a:p>
+            <a:r>
+              <a:rPr lang="fr-FR" b="1" dirty="0" smtClean="0">
+                <a:solidFill>
+                  <a:srgbClr val="FF0000"/>
+                </a:solidFill>
+              </a:rPr>
+              <a:t>VCC</a:t>
+            </a:r>
+            <a:endParaRPr lang="fr-FR" b="1" dirty="0">
+              <a:solidFill>
+                <a:srgbClr val="FF0000"/>
+              </a:solidFill>
+            </a:endParaRPr>
+          </a:p>
+        </p:txBody>
+      </p:sp>
+    </p:spTree>
+  </p:cSld>
+  <p:clrMapOvr>
+    <a:masterClrMapping/>
+  </p:clrMapOvr>
+  <p:timing>
+    <p:tnLst>
+      <p:par>
+        <p:cTn id="1" dur="indefinite" restart="never" nodeType="tmRoot"/>
+      </p:par>
+    </p:tnLst>
+  </p:timing>
+</p:sld>
+</file>
+
+<file path=ppt/slides/slide4.xml><?xml version="1.0" encoding="utf-8"?>
 <p:sld xmlns:a="http://schemas.openxmlformats.org/drawingml/2006/main" xmlns:r="http://schemas.openxmlformats.org/officeDocument/2006/relationships" xmlns:p="http://schemas.openxmlformats.org/presentationml/2006/main">
   <p:cSld>
     <p:spTree>
@@ -7064,7 +7514,7 @@
   <a:extraClrSchemeLst/>
   <a:extLst>
     <a:ext uri="{05A4C25C-085E-4340-85A3-A5531E510DB2}">
-      <thm15:themeFamily xmlns="" xmlns:thm15="http://schemas.microsoft.com/office/thememl/2012/main" name="Office Theme" id="{62F939B6-93AF-4DB8-9C6B-D6C7DFDC589F}" vid="{4A3C46E8-61CC-4603-A589-7422A47A8E4A}"/>
+      <thm15:themeFamily xmlns:thm15="http://schemas.microsoft.com/office/thememl/2012/main" xmlns="" name="Office Theme" id="{62F939B6-93AF-4DB8-9C6B-D6C7DFDC589F}" vid="{4A3C46E8-61CC-4603-A589-7422A47A8E4A}"/>
     </a:ext>
   </a:extLst>
 </a:theme>

--- a/Pictures/Chip_comparison.pptx
+++ b/Pictures/Chip_comparison.pptx
@@ -109,7 +109,7 @@
   </p:defaultTextStyle>
   <p:extLst>
     <p:ext uri="{EFAFB233-063F-42B5-8137-9DF3F51BA10A}">
-      <p15:sldGuideLst xmlns:p15="http://schemas.microsoft.com/office/powerpoint/2012/main" xmlns="">
+      <p15:sldGuideLst xmlns="" xmlns:p15="http://schemas.microsoft.com/office/powerpoint/2012/main">
         <p15:guide id="1" orient="horz" pos="2160">
           <p15:clr>
             <a:srgbClr val="A4A3A4"/>
@@ -131,7 +131,7 @@
   <p:cmAuthor id="1" name="boichot" initials="b" lastIdx="1" clrIdx="0">
     <p:extLst>
       <p:ext uri="{19B8F6BF-5375-455C-9EA6-DF929625EA0E}">
-        <p15:presenceInfo xmlns:p15="http://schemas.microsoft.com/office/powerpoint/2012/main" xmlns="" userId="boichot" providerId="None"/>
+        <p15:presenceInfo xmlns="" xmlns:p15="http://schemas.microsoft.com/office/powerpoint/2012/main" userId="boichot" providerId="None"/>
       </p:ext>
     </p:extLst>
   </p:cmAuthor>
@@ -322,7 +322,7 @@
     </p:spTree>
     <p:extLst>
       <p:ext uri="{BB962C8B-B14F-4D97-AF65-F5344CB8AC3E}">
-        <p14:creationId xmlns:p14="http://schemas.microsoft.com/office/powerpoint/2010/main" xmlns="" val="2003778223"/>
+        <p14:creationId xmlns="" xmlns:p14="http://schemas.microsoft.com/office/powerpoint/2010/main" val="2003778223"/>
       </p:ext>
     </p:extLst>
   </p:cSld>
@@ -494,7 +494,7 @@
     </p:spTree>
     <p:extLst>
       <p:ext uri="{BB962C8B-B14F-4D97-AF65-F5344CB8AC3E}">
-        <p14:creationId xmlns:p14="http://schemas.microsoft.com/office/powerpoint/2010/main" xmlns="" val="3709322164"/>
+        <p14:creationId xmlns="" xmlns:p14="http://schemas.microsoft.com/office/powerpoint/2010/main" val="3709322164"/>
       </p:ext>
     </p:extLst>
   </p:cSld>
@@ -676,7 +676,7 @@
     </p:spTree>
     <p:extLst>
       <p:ext uri="{BB962C8B-B14F-4D97-AF65-F5344CB8AC3E}">
-        <p14:creationId xmlns:p14="http://schemas.microsoft.com/office/powerpoint/2010/main" xmlns="" val="1419434073"/>
+        <p14:creationId xmlns="" xmlns:p14="http://schemas.microsoft.com/office/powerpoint/2010/main" val="1419434073"/>
       </p:ext>
     </p:extLst>
   </p:cSld>
@@ -848,7 +848,7 @@
     </p:spTree>
     <p:extLst>
       <p:ext uri="{BB962C8B-B14F-4D97-AF65-F5344CB8AC3E}">
-        <p14:creationId xmlns:p14="http://schemas.microsoft.com/office/powerpoint/2010/main" xmlns="" val="1102157496"/>
+        <p14:creationId xmlns="" xmlns:p14="http://schemas.microsoft.com/office/powerpoint/2010/main" val="1102157496"/>
       </p:ext>
     </p:extLst>
   </p:cSld>
@@ -1096,7 +1096,7 @@
     </p:spTree>
     <p:extLst>
       <p:ext uri="{BB962C8B-B14F-4D97-AF65-F5344CB8AC3E}">
-        <p14:creationId xmlns:p14="http://schemas.microsoft.com/office/powerpoint/2010/main" xmlns="" val="660080195"/>
+        <p14:creationId xmlns="" xmlns:p14="http://schemas.microsoft.com/office/powerpoint/2010/main" val="660080195"/>
       </p:ext>
     </p:extLst>
   </p:cSld>
@@ -1330,7 +1330,7 @@
     </p:spTree>
     <p:extLst>
       <p:ext uri="{BB962C8B-B14F-4D97-AF65-F5344CB8AC3E}">
-        <p14:creationId xmlns:p14="http://schemas.microsoft.com/office/powerpoint/2010/main" xmlns="" val="2283449542"/>
+        <p14:creationId xmlns="" xmlns:p14="http://schemas.microsoft.com/office/powerpoint/2010/main" val="2283449542"/>
       </p:ext>
     </p:extLst>
   </p:cSld>
@@ -1699,7 +1699,7 @@
     </p:spTree>
     <p:extLst>
       <p:ext uri="{BB962C8B-B14F-4D97-AF65-F5344CB8AC3E}">
-        <p14:creationId xmlns:p14="http://schemas.microsoft.com/office/powerpoint/2010/main" xmlns="" val="2663865323"/>
+        <p14:creationId xmlns="" xmlns:p14="http://schemas.microsoft.com/office/powerpoint/2010/main" val="2663865323"/>
       </p:ext>
     </p:extLst>
   </p:cSld>
@@ -1819,7 +1819,7 @@
     </p:spTree>
     <p:extLst>
       <p:ext uri="{BB962C8B-B14F-4D97-AF65-F5344CB8AC3E}">
-        <p14:creationId xmlns:p14="http://schemas.microsoft.com/office/powerpoint/2010/main" xmlns="" val="376323583"/>
+        <p14:creationId xmlns="" xmlns:p14="http://schemas.microsoft.com/office/powerpoint/2010/main" val="376323583"/>
       </p:ext>
     </p:extLst>
   </p:cSld>
@@ -1916,7 +1916,7 @@
     </p:spTree>
     <p:extLst>
       <p:ext uri="{BB962C8B-B14F-4D97-AF65-F5344CB8AC3E}">
-        <p14:creationId xmlns:p14="http://schemas.microsoft.com/office/powerpoint/2010/main" xmlns="" val="3989902220"/>
+        <p14:creationId xmlns="" xmlns:p14="http://schemas.microsoft.com/office/powerpoint/2010/main" val="3989902220"/>
       </p:ext>
     </p:extLst>
   </p:cSld>
@@ -2195,7 +2195,7 @@
     </p:spTree>
     <p:extLst>
       <p:ext uri="{BB962C8B-B14F-4D97-AF65-F5344CB8AC3E}">
-        <p14:creationId xmlns:p14="http://schemas.microsoft.com/office/powerpoint/2010/main" xmlns="" val="1997102884"/>
+        <p14:creationId xmlns="" xmlns:p14="http://schemas.microsoft.com/office/powerpoint/2010/main" val="1997102884"/>
       </p:ext>
     </p:extLst>
   </p:cSld>
@@ -2450,7 +2450,7 @@
     </p:spTree>
     <p:extLst>
       <p:ext uri="{BB962C8B-B14F-4D97-AF65-F5344CB8AC3E}">
-        <p14:creationId xmlns:p14="http://schemas.microsoft.com/office/powerpoint/2010/main" xmlns="" val="3738991770"/>
+        <p14:creationId xmlns="" xmlns:p14="http://schemas.microsoft.com/office/powerpoint/2010/main" val="3738991770"/>
       </p:ext>
     </p:extLst>
   </p:cSld>
@@ -2701,7 +2701,7 @@
     </p:spTree>
     <p:extLst>
       <p:ext uri="{BB962C8B-B14F-4D97-AF65-F5344CB8AC3E}">
-        <p14:creationId xmlns:p14="http://schemas.microsoft.com/office/powerpoint/2010/main" xmlns="" val="4265157320"/>
+        <p14:creationId xmlns="" xmlns:p14="http://schemas.microsoft.com/office/powerpoint/2010/main" val="4265157320"/>
       </p:ext>
     </p:extLst>
   </p:cSld>
@@ -6413,7 +6413,7 @@
     </p:spTree>
     <p:extLst>
       <p:ext uri="{BB962C8B-B14F-4D97-AF65-F5344CB8AC3E}">
-        <p14:creationId xmlns:p14="http://schemas.microsoft.com/office/powerpoint/2010/main" xmlns="" val="3182372557"/>
+        <p14:creationId xmlns="" xmlns:p14="http://schemas.microsoft.com/office/powerpoint/2010/main" val="3182372557"/>
       </p:ext>
     </p:extLst>
   </p:cSld>
@@ -6480,8 +6480,8 @@
           <p:nvPr/>
         </p:nvSpPr>
         <p:spPr>
-          <a:xfrm rot="16200000">
-            <a:off x="3479180" y="2464421"/>
+          <a:xfrm rot="18826155">
+            <a:off x="2955074" y="2319455"/>
             <a:ext cx="1690206" cy="369332"/>
           </a:xfrm>
           <a:prstGeom prst="rect">
@@ -6542,8 +6542,8 @@
           <p:nvPr/>
         </p:nvSpPr>
         <p:spPr>
-          <a:xfrm rot="16200000">
-            <a:off x="3127626" y="2549914"/>
+          <a:xfrm rot="18933514">
+            <a:off x="2447403" y="2315739"/>
             <a:ext cx="1850635" cy="369332"/>
           </a:xfrm>
           <a:prstGeom prst="rect">
@@ -6864,6 +6864,43 @@
           </a:p>
         </p:txBody>
       </p:sp>
+      <p:pic>
+        <p:nvPicPr>
+          <p:cNvPr id="1027" name="Picture 3" descr="C:\Users\BOICHOT\Downloads\Arduino_Mega_Burner-main\Pictures\SOP44_Pinout.png"/>
+          <p:cNvPicPr>
+            <a:picLocks noChangeAspect="1" noChangeArrowheads="1"/>
+          </p:cNvPicPr>
+          <p:nvPr/>
+        </p:nvPicPr>
+        <p:blipFill>
+          <a:blip r:embed="rId3" cstate="print">
+            <a:clrChange>
+              <a:clrFrom>
+                <a:srgbClr val="FFFFFF"/>
+              </a:clrFrom>
+              <a:clrTo>
+                <a:srgbClr val="FFFFFF">
+                  <a:alpha val="0"/>
+                </a:srgbClr>
+              </a:clrTo>
+            </a:clrChange>
+          </a:blip>
+          <a:srcRect/>
+          <a:stretch>
+            <a:fillRect/>
+          </a:stretch>
+        </p:blipFill>
+        <p:spPr bwMode="auto">
+          <a:xfrm>
+            <a:off x="4326672" y="1889409"/>
+            <a:ext cx="5145203" cy="2883362"/>
+          </a:xfrm>
+          <a:prstGeom prst="rect">
+            <a:avLst/>
+          </a:prstGeom>
+          <a:noFill/>
+        </p:spPr>
+      </p:pic>
     </p:spTree>
   </p:cSld>
   <p:clrMapOvr>
@@ -7514,7 +7551,7 @@
   <a:extraClrSchemeLst/>
   <a:extLst>
     <a:ext uri="{05A4C25C-085E-4340-85A3-A5531E510DB2}">
-      <thm15:themeFamily xmlns:thm15="http://schemas.microsoft.com/office/thememl/2012/main" xmlns="" name="Office Theme" id="{62F939B6-93AF-4DB8-9C6B-D6C7DFDC589F}" vid="{4A3C46E8-61CC-4603-A589-7422A47A8E4A}"/>
+      <thm15:themeFamily xmlns="" xmlns:thm15="http://schemas.microsoft.com/office/thememl/2012/main" name="Office Theme" id="{62F939B6-93AF-4DB8-9C6B-D6C7DFDC589F}" vid="{4A3C46E8-61CC-4603-A589-7422A47A8E4A}"/>
     </a:ext>
   </a:extLst>
 </a:theme>
